--- a/slides/glake/3page.pptx
+++ b/slides/glake/3page.pptx
@@ -4533,7 +4533,7 @@
               </a:defRPr>
             </a:pPr>
             <a:r>
-              <a:t>129万</a:t>
+              <a:t>389万</a:t>
             </a:r>
           </a:p>
           <a:p>
@@ -4615,7 +4615,7 @@
               </a:defRPr>
             </a:pPr>
             <a:r>
-              <a:t>1.637亿</a:t>
+              <a:t>1.64亿</a:t>
             </a:r>
           </a:p>
           <a:p>
@@ -4697,7 +4697,7 @@
               </a:defRPr>
             </a:pPr>
             <a:r>
-              <a:t>497万</a:t>
+              <a:t>800万</a:t>
             </a:r>
           </a:p>
           <a:p>
@@ -4779,7 +4779,7 @@
               </a:defRPr>
             </a:pPr>
             <a:r>
-              <a:t>187亿+</a:t>
+              <a:t>443GB</a:t>
             </a:r>
           </a:p>
           <a:p>
